--- a/AI-Risk-Triage-V1-Quick-Operational-Blueprint-v3.pptx
+++ b/AI-Risk-Triage-V1-Quick-Operational-Blueprint-v3.pptx
@@ -110,6 +110,11 @@
       </a:defRPr>
     </a:lvl9pPr>
   </p:defaultTextStyle>
+  <p:extLst>
+    <p:ext uri="{EFAFB233-063F-42B5-8137-9DF3F51BA10A}">
+      <p15:sldGuideLst xmlns:p15="http://schemas.microsoft.com/office/powerpoint/2012/main"/>
+    </p:ext>
+  </p:extLst>
 </p:presentation>
 </file>
 
@@ -1335,7 +1340,7 @@
               </a:defRPr>
             </a:pPr>
             <a:r>
-              <a:rPr sz="1725" b="1">
+              <a:rPr sz="1725" b="1" dirty="0">
                 <a:solidFill>
                   <a:srgbClr val="102A43"/>
                 </a:solidFill>
@@ -1449,6 +1454,339 @@
               </a:defRPr>
             </a:pPr>
             <a:r>
+              <a:rPr sz="1275" b="0" dirty="0">
+                <a:solidFill>
+                  <a:srgbClr val="1D2B36"/>
+                </a:solidFill>
+                <a:latin typeface="Bitstream Charter"/>
+                <a:ea typeface="Bitstream Charter"/>
+                <a:cs typeface="Bitstream Charter"/>
+              </a:rPr>
+              <a:t>Load questions from the approved active template.</a:t>
+            </a:r>
+          </a:p>
+          <a:p>
+            <a:endParaRPr sz="1275" b="0" dirty="0">
+              <a:solidFill>
+                <a:srgbClr val="1D2B36"/>
+              </a:solidFill>
+              <a:latin typeface="Bitstream Charter"/>
+              <a:ea typeface="Bitstream Charter"/>
+              <a:cs typeface="Bitstream Charter"/>
+            </a:endParaRPr>
+          </a:p>
+          <a:p>
+            <a:pPr algn="l">
+              <a:defRPr sz="1275" b="0">
+                <a:solidFill>
+                  <a:srgbClr val="1D2B36"/>
+                </a:solidFill>
+                <a:latin typeface="Bitstream Charter"/>
+                <a:ea typeface="Bitstream Charter"/>
+                <a:cs typeface="Bitstream Charter"/>
+              </a:defRPr>
+            </a:pPr>
+            <a:r>
+              <a:rPr sz="1275" b="0" dirty="0">
+                <a:solidFill>
+                  <a:srgbClr val="1D2B36"/>
+                </a:solidFill>
+                <a:latin typeface="Bitstream Charter"/>
+                <a:ea typeface="Bitstream Charter"/>
+                <a:cs typeface="Bitstream Charter"/>
+              </a:rPr>
+              <a:t>Capture multiple-choice answers, rationale, use-case details and evidence.</a:t>
+            </a:r>
+          </a:p>
+          <a:p>
+            <a:endParaRPr sz="1275" b="0" dirty="0">
+              <a:solidFill>
+                <a:srgbClr val="1D2B36"/>
+              </a:solidFill>
+              <a:latin typeface="Bitstream Charter"/>
+              <a:ea typeface="Bitstream Charter"/>
+              <a:cs typeface="Bitstream Charter"/>
+            </a:endParaRPr>
+          </a:p>
+          <a:p>
+            <a:pPr algn="l">
+              <a:defRPr sz="1275" b="0">
+                <a:solidFill>
+                  <a:srgbClr val="1D2B36"/>
+                </a:solidFill>
+                <a:latin typeface="Bitstream Charter"/>
+                <a:ea typeface="Bitstream Charter"/>
+                <a:cs typeface="Bitstream Charter"/>
+              </a:defRPr>
+            </a:pPr>
+            <a:r>
+              <a:rPr sz="1275" b="0" dirty="0">
+                <a:solidFill>
+                  <a:srgbClr val="1D2B36"/>
+                </a:solidFill>
+                <a:latin typeface="Bitstream Charter"/>
+                <a:ea typeface="Bitstream Charter"/>
+                <a:cs typeface="Bitstream Charter"/>
+              </a:rPr>
+              <a:t>Save draft and submit.</a:t>
+            </a:r>
+          </a:p>
+        </p:txBody>
+      </p:sp>
+      <p:sp>
+        <p:nvSpPr>
+          <p:cNvPr id="9" name="矩形: 圆角 8">
+            <a:extLst>
+              <a:ext uri="{FF2B5EF4-FFF2-40B4-BE49-F238E27FC236}">
+                <a16:creationId xmlns:a16="http://schemas.microsoft.com/office/drawing/2014/main" id="{923E8F02-F135-4D9B-B1CE-ECAD83FBCA16}"/>
+              </a:ext>
+            </a:extLst>
+          </p:cNvPr>
+          <p:cNvSpPr>
+            <a:spLocks noGrp="1"/>
+          </p:cNvSpPr>
+          <p:nvPr/>
+        </p:nvSpPr>
+        <p:spPr>
+          <a:xfrm>
+            <a:off x="3333750" y="1619250"/>
+            <a:ext cx="2381250" cy="3143250"/>
+          </a:xfrm>
+          <a:prstGeom prst="roundRect">
+            <a:avLst>
+              <a:gd name="adj" fmla="val 5600"/>
+            </a:avLst>
+          </a:prstGeom>
+          <a:solidFill>
+            <a:srgbClr val="E7F4F2"/>
+          </a:solidFill>
+          <a:ln w="9525">
+            <a:solidFill>
+              <a:srgbClr val="C8D3DC"/>
+            </a:solidFill>
+            <a:prstDash val="solid"/>
+          </a:ln>
+        </p:spPr>
+      </p:sp>
+      <p:sp>
+        <p:nvSpPr>
+          <p:cNvPr id="10" name="椭圆 9">
+            <a:extLst>
+              <a:ext uri="{FF2B5EF4-FFF2-40B4-BE49-F238E27FC236}">
+                <a16:creationId xmlns:a16="http://schemas.microsoft.com/office/drawing/2014/main" id="{2F783229-9EF3-4DDC-9B27-255F83E29F2C}"/>
+              </a:ext>
+            </a:extLst>
+          </p:cNvPr>
+          <p:cNvSpPr>
+            <a:spLocks noGrp="1"/>
+          </p:cNvSpPr>
+          <p:nvPr/>
+        </p:nvSpPr>
+        <p:spPr>
+          <a:xfrm>
+            <a:off x="3505200" y="1809750"/>
+            <a:ext cx="400050" cy="400050"/>
+          </a:xfrm>
+          <a:prstGeom prst="ellipse">
+            <a:avLst/>
+          </a:prstGeom>
+          <a:solidFill>
+            <a:srgbClr val="187B78"/>
+          </a:solidFill>
+          <a:ln w="0">
+            <a:solidFill>
+              <a:srgbClr val="187B78"/>
+            </a:solidFill>
+          </a:ln>
+        </p:spPr>
+        <p:txBody>
+          <a:bodyPr lIns="0" tIns="0" rIns="0" bIns="0" anchor="ctr">
+            <a:noAutofit/>
+          </a:bodyPr>
+          <a:lstStyle/>
+          <a:p>
+            <a:pPr algn="ctr">
+              <a:defRPr sz="1500" b="1">
+                <a:solidFill>
+                  <a:srgbClr val="FFFFFF"/>
+                </a:solidFill>
+                <a:latin typeface="Bitstream Charter"/>
+                <a:ea typeface="Bitstream Charter"/>
+                <a:cs typeface="Bitstream Charter"/>
+              </a:defRPr>
+            </a:pPr>
+            <a:r>
+              <a:rPr sz="1500" b="1">
+                <a:solidFill>
+                  <a:srgbClr val="FFFFFF"/>
+                </a:solidFill>
+                <a:latin typeface="Bitstream Charter"/>
+                <a:ea typeface="Bitstream Charter"/>
+                <a:cs typeface="Bitstream Charter"/>
+              </a:rPr>
+              <a:t>2</a:t>
+            </a:r>
+          </a:p>
+        </p:txBody>
+      </p:sp>
+      <p:sp>
+        <p:nvSpPr>
+          <p:cNvPr id="11" name="矩形 10">
+            <a:extLst>
+              <a:ext uri="{FF2B5EF4-FFF2-40B4-BE49-F238E27FC236}">
+                <a16:creationId xmlns:a16="http://schemas.microsoft.com/office/drawing/2014/main" id="{F700E4F7-944F-43A8-87BA-02FAFAD6AD48}"/>
+              </a:ext>
+            </a:extLst>
+          </p:cNvPr>
+          <p:cNvSpPr>
+            <a:spLocks noGrp="1"/>
+          </p:cNvSpPr>
+          <p:nvPr/>
+        </p:nvSpPr>
+        <p:spPr>
+          <a:xfrm>
+            <a:off x="4019550" y="1781175"/>
+            <a:ext cx="1524000" cy="495300"/>
+          </a:xfrm>
+          <a:prstGeom prst="rect">
+            <a:avLst/>
+          </a:prstGeom>
+          <a:noFill/>
+          <a:ln w="0">
+            <a:noFill/>
+          </a:ln>
+        </p:spPr>
+        <p:txBody>
+          <a:bodyPr lIns="19050" tIns="19050" rIns="19050" bIns="19050" anchor="ctr">
+            <a:normAutofit fontScale="96224"/>
+          </a:bodyPr>
+          <a:lstStyle/>
+          <a:p>
+            <a:pPr algn="l">
+              <a:defRPr sz="1725" b="1">
+                <a:solidFill>
+                  <a:srgbClr val="102A43"/>
+                </a:solidFill>
+                <a:latin typeface="Bitstream Charter"/>
+                <a:ea typeface="Bitstream Charter"/>
+                <a:cs typeface="Bitstream Charter"/>
+              </a:defRPr>
+            </a:pPr>
+            <a:r>
+              <a:rPr sz="1725" b="1">
+                <a:solidFill>
+                  <a:srgbClr val="102A43"/>
+                </a:solidFill>
+                <a:latin typeface="Bitstream Charter"/>
+                <a:ea typeface="Bitstream Charter"/>
+                <a:cs typeface="Bitstream Charter"/>
+              </a:rPr>
+              <a:t>System proposal</a:t>
+            </a:r>
+          </a:p>
+        </p:txBody>
+      </p:sp>
+      <p:sp>
+        <p:nvSpPr>
+          <p:cNvPr id="12" name="矩形 11">
+            <a:extLst>
+              <a:ext uri="{FF2B5EF4-FFF2-40B4-BE49-F238E27FC236}">
+                <a16:creationId xmlns:a16="http://schemas.microsoft.com/office/drawing/2014/main" id="{2ED8B723-2C93-43EC-A211-EBA4D9670935}"/>
+              </a:ext>
+            </a:extLst>
+          </p:cNvPr>
+          <p:cNvSpPr>
+            <a:spLocks noGrp="1"/>
+          </p:cNvSpPr>
+          <p:nvPr/>
+        </p:nvSpPr>
+        <p:spPr>
+          <a:xfrm>
+            <a:off x="3524250" y="2362200"/>
+            <a:ext cx="2000250" cy="323850"/>
+          </a:xfrm>
+          <a:prstGeom prst="rect">
+            <a:avLst/>
+          </a:prstGeom>
+          <a:noFill/>
+          <a:ln w="0">
+            <a:noFill/>
+          </a:ln>
+        </p:spPr>
+        <p:txBody>
+          <a:bodyPr lIns="19050" tIns="19050" rIns="19050" bIns="19050" anchor="ctr">
+            <a:normAutofit/>
+          </a:bodyPr>
+          <a:lstStyle/>
+          <a:p>
+            <a:pPr algn="l">
+              <a:defRPr sz="1125" b="1">
+                <a:solidFill>
+                  <a:srgbClr val="187B78"/>
+                </a:solidFill>
+                <a:latin typeface="Bitstream Charter"/>
+                <a:ea typeface="Bitstream Charter"/>
+                <a:cs typeface="Bitstream Charter"/>
+              </a:defRPr>
+            </a:pPr>
+            <a:r>
+              <a:rPr sz="1125" b="1" dirty="0">
+                <a:solidFill>
+                  <a:srgbClr val="187B78"/>
+                </a:solidFill>
+                <a:latin typeface="Bitstream Charter"/>
+                <a:ea typeface="Bitstream Charter"/>
+                <a:cs typeface="Bitstream Charter"/>
+              </a:rPr>
+              <a:t>Power Automate</a:t>
+            </a:r>
+          </a:p>
+        </p:txBody>
+      </p:sp>
+      <p:sp>
+        <p:nvSpPr>
+          <p:cNvPr id="13" name="矩形 12">
+            <a:extLst>
+              <a:ext uri="{FF2B5EF4-FFF2-40B4-BE49-F238E27FC236}">
+                <a16:creationId xmlns:a16="http://schemas.microsoft.com/office/drawing/2014/main" id="{A90E8E3A-3044-44BB-814E-1459B0A96C40}"/>
+              </a:ext>
+            </a:extLst>
+          </p:cNvPr>
+          <p:cNvSpPr>
+            <a:spLocks noGrp="1"/>
+          </p:cNvSpPr>
+          <p:nvPr/>
+        </p:nvSpPr>
+        <p:spPr>
+          <a:xfrm>
+            <a:off x="3524250" y="2800350"/>
+            <a:ext cx="2000250" cy="1752600"/>
+          </a:xfrm>
+          <a:prstGeom prst="rect">
+            <a:avLst/>
+          </a:prstGeom>
+          <a:noFill/>
+          <a:ln w="0">
+            <a:noFill/>
+          </a:ln>
+        </p:spPr>
+        <p:txBody>
+          <a:bodyPr lIns="19050" tIns="19050" rIns="19050" bIns="19050" anchor="t">
+            <a:normAutofit fontScale="91079"/>
+          </a:bodyPr>
+          <a:lstStyle/>
+          <a:p>
+            <a:pPr algn="l">
+              <a:defRPr sz="1275" b="0">
+                <a:solidFill>
+                  <a:srgbClr val="1D2B36"/>
+                </a:solidFill>
+                <a:latin typeface="Bitstream Charter"/>
+                <a:ea typeface="Bitstream Charter"/>
+                <a:cs typeface="Bitstream Charter"/>
+              </a:defRPr>
+            </a:pPr>
+            <a:r>
               <a:rPr sz="1275" b="0">
                 <a:solidFill>
                   <a:srgbClr val="1D2B36"/>
@@ -1457,7 +1795,7 @@
                 <a:ea typeface="Bitstream Charter"/>
                 <a:cs typeface="Bitstream Charter"/>
               </a:rPr>
-              <a:t>Load questions from the approved active template.</a:t>
+              <a:t>Validate required information.</a:t>
             </a:r>
           </a:p>
           <a:p>
@@ -1490,7 +1828,7 @@
                 <a:ea typeface="Bitstream Charter"/>
                 <a:cs typeface="Bitstream Charter"/>
               </a:rPr>
-              <a:t>Capture multiple-choice answers, rationale, use-case details and evidence.</a:t>
+              <a:t>Freeze the input and rule versions.</a:t>
             </a:r>
           </a:p>
           <a:p>
@@ -1523,274 +1861,7 @@
                 <a:ea typeface="Bitstream Charter"/>
                 <a:cs typeface="Bitstream Charter"/>
               </a:rPr>
-              <a:t>Save draft and submit.</a:t>
-            </a:r>
-          </a:p>
-        </p:txBody>
-      </p:sp>
-      <p:sp>
-        <p:nvSpPr>
-          <p:cNvPr id="9" name="矩形: 圆角 8">
-            <a:extLst>
-              <a:ext uri="{FF2B5EF4-FFF2-40B4-BE49-F238E27FC236}">
-                <a16:creationId xmlns:a16="http://schemas.microsoft.com/office/drawing/2014/main" id="{923E8F02-F135-4D9B-B1CE-ECAD83FBCA16}"/>
-              </a:ext>
-            </a:extLst>
-          </p:cNvPr>
-          <p:cNvSpPr>
-            <a:spLocks noGrp="1"/>
-          </p:cNvSpPr>
-          <p:nvPr/>
-        </p:nvSpPr>
-        <p:spPr>
-          <a:xfrm>
-            <a:off x="3333750" y="1619250"/>
-            <a:ext cx="2381250" cy="3143250"/>
-          </a:xfrm>
-          <a:prstGeom prst="roundRect">
-            <a:avLst>
-              <a:gd name="adj" fmla="val 5600"/>
-            </a:avLst>
-          </a:prstGeom>
-          <a:solidFill>
-            <a:srgbClr val="E7F4F2"/>
-          </a:solidFill>
-          <a:ln w="9525">
-            <a:solidFill>
-              <a:srgbClr val="C8D3DC"/>
-            </a:solidFill>
-            <a:prstDash val="solid"/>
-          </a:ln>
-        </p:spPr>
-      </p:sp>
-      <p:sp>
-        <p:nvSpPr>
-          <p:cNvPr id="10" name="椭圆 9">
-            <a:extLst>
-              <a:ext uri="{FF2B5EF4-FFF2-40B4-BE49-F238E27FC236}">
-                <a16:creationId xmlns:a16="http://schemas.microsoft.com/office/drawing/2014/main" id="{2F783229-9EF3-4DDC-9B27-255F83E29F2C}"/>
-              </a:ext>
-            </a:extLst>
-          </p:cNvPr>
-          <p:cNvSpPr>
-            <a:spLocks noGrp="1"/>
-          </p:cNvSpPr>
-          <p:nvPr/>
-        </p:nvSpPr>
-        <p:spPr>
-          <a:xfrm>
-            <a:off x="3505200" y="1809750"/>
-            <a:ext cx="400050" cy="400050"/>
-          </a:xfrm>
-          <a:prstGeom prst="ellipse">
-            <a:avLst/>
-          </a:prstGeom>
-          <a:solidFill>
-            <a:srgbClr val="187B78"/>
-          </a:solidFill>
-          <a:ln w="0">
-            <a:solidFill>
-              <a:srgbClr val="187B78"/>
-            </a:solidFill>
-          </a:ln>
-        </p:spPr>
-        <p:txBody>
-          <a:bodyPr lIns="0" tIns="0" rIns="0" bIns="0" anchor="ctr">
-            <a:noAutofit/>
-          </a:bodyPr>
-          <a:lstStyle/>
-          <a:p>
-            <a:pPr algn="ctr">
-              <a:defRPr sz="1500" b="1">
-                <a:solidFill>
-                  <a:srgbClr val="FFFFFF"/>
-                </a:solidFill>
-                <a:latin typeface="Bitstream Charter"/>
-                <a:ea typeface="Bitstream Charter"/>
-                <a:cs typeface="Bitstream Charter"/>
-              </a:defRPr>
-            </a:pPr>
-            <a:r>
-              <a:rPr sz="1500" b="1">
-                <a:solidFill>
-                  <a:srgbClr val="FFFFFF"/>
-                </a:solidFill>
-                <a:latin typeface="Bitstream Charter"/>
-                <a:ea typeface="Bitstream Charter"/>
-                <a:cs typeface="Bitstream Charter"/>
-              </a:rPr>
-              <a:t>2</a:t>
-            </a:r>
-          </a:p>
-        </p:txBody>
-      </p:sp>
-      <p:sp>
-        <p:nvSpPr>
-          <p:cNvPr id="11" name="矩形 10">
-            <a:extLst>
-              <a:ext uri="{FF2B5EF4-FFF2-40B4-BE49-F238E27FC236}">
-                <a16:creationId xmlns:a16="http://schemas.microsoft.com/office/drawing/2014/main" id="{F700E4F7-944F-43A8-87BA-02FAFAD6AD48}"/>
-              </a:ext>
-            </a:extLst>
-          </p:cNvPr>
-          <p:cNvSpPr>
-            <a:spLocks noGrp="1"/>
-          </p:cNvSpPr>
-          <p:nvPr/>
-        </p:nvSpPr>
-        <p:spPr>
-          <a:xfrm>
-            <a:off x="4019550" y="1781175"/>
-            <a:ext cx="1524000" cy="495300"/>
-          </a:xfrm>
-          <a:prstGeom prst="rect">
-            <a:avLst/>
-          </a:prstGeom>
-          <a:noFill/>
-          <a:ln w="0">
-            <a:noFill/>
-          </a:ln>
-        </p:spPr>
-        <p:txBody>
-          <a:bodyPr lIns="19050" tIns="19050" rIns="19050" bIns="19050" anchor="ctr">
-            <a:normAutofit fontScale="96224"/>
-          </a:bodyPr>
-          <a:lstStyle/>
-          <a:p>
-            <a:pPr algn="l">
-              <a:defRPr sz="1725" b="1">
-                <a:solidFill>
-                  <a:srgbClr val="102A43"/>
-                </a:solidFill>
-                <a:latin typeface="Bitstream Charter"/>
-                <a:ea typeface="Bitstream Charter"/>
-                <a:cs typeface="Bitstream Charter"/>
-              </a:defRPr>
-            </a:pPr>
-            <a:r>
-              <a:rPr sz="1725" b="1">
-                <a:solidFill>
-                  <a:srgbClr val="102A43"/>
-                </a:solidFill>
-                <a:latin typeface="Bitstream Charter"/>
-                <a:ea typeface="Bitstream Charter"/>
-                <a:cs typeface="Bitstream Charter"/>
-              </a:rPr>
-              <a:t>System proposal</a:t>
-            </a:r>
-          </a:p>
-        </p:txBody>
-      </p:sp>
-      <p:sp>
-        <p:nvSpPr>
-          <p:cNvPr id="12" name="矩形 11">
-            <a:extLst>
-              <a:ext uri="{FF2B5EF4-FFF2-40B4-BE49-F238E27FC236}">
-                <a16:creationId xmlns:a16="http://schemas.microsoft.com/office/drawing/2014/main" id="{2ED8B723-2C93-43EC-A211-EBA4D9670935}"/>
-              </a:ext>
-            </a:extLst>
-          </p:cNvPr>
-          <p:cNvSpPr>
-            <a:spLocks noGrp="1"/>
-          </p:cNvSpPr>
-          <p:nvPr/>
-        </p:nvSpPr>
-        <p:spPr>
-          <a:xfrm>
-            <a:off x="3524250" y="2362200"/>
-            <a:ext cx="2000250" cy="323850"/>
-          </a:xfrm>
-          <a:prstGeom prst="rect">
-            <a:avLst/>
-          </a:prstGeom>
-          <a:noFill/>
-          <a:ln w="0">
-            <a:noFill/>
-          </a:ln>
-        </p:spPr>
-        <p:txBody>
-          <a:bodyPr lIns="19050" tIns="19050" rIns="19050" bIns="19050" anchor="ctr">
-            <a:normAutofit/>
-          </a:bodyPr>
-          <a:lstStyle/>
-          <a:p>
-            <a:pPr algn="l">
-              <a:defRPr sz="1125" b="1">
-                <a:solidFill>
-                  <a:srgbClr val="187B78"/>
-                </a:solidFill>
-                <a:latin typeface="Bitstream Charter"/>
-                <a:ea typeface="Bitstream Charter"/>
-                <a:cs typeface="Bitstream Charter"/>
-              </a:defRPr>
-            </a:pPr>
-            <a:r>
-              <a:rPr sz="1125" b="1" dirty="0">
-                <a:solidFill>
-                  <a:srgbClr val="187B78"/>
-                </a:solidFill>
-                <a:latin typeface="Bitstream Charter"/>
-                <a:ea typeface="Bitstream Charter"/>
-                <a:cs typeface="Bitstream Charter"/>
-              </a:rPr>
-              <a:t>Power Automate</a:t>
-            </a:r>
-          </a:p>
-        </p:txBody>
-      </p:sp>
-      <p:sp>
-        <p:nvSpPr>
-          <p:cNvPr id="13" name="矩形 12">
-            <a:extLst>
-              <a:ext uri="{FF2B5EF4-FFF2-40B4-BE49-F238E27FC236}">
-                <a16:creationId xmlns:a16="http://schemas.microsoft.com/office/drawing/2014/main" id="{A90E8E3A-3044-44BB-814E-1459B0A96C40}"/>
-              </a:ext>
-            </a:extLst>
-          </p:cNvPr>
-          <p:cNvSpPr>
-            <a:spLocks noGrp="1"/>
-          </p:cNvSpPr>
-          <p:nvPr/>
-        </p:nvSpPr>
-        <p:spPr>
-          <a:xfrm>
-            <a:off x="3524250" y="2800350"/>
-            <a:ext cx="2000250" cy="1752600"/>
-          </a:xfrm>
-          <a:prstGeom prst="rect">
-            <a:avLst/>
-          </a:prstGeom>
-          <a:noFill/>
-          <a:ln w="0">
-            <a:noFill/>
-          </a:ln>
-        </p:spPr>
-        <p:txBody>
-          <a:bodyPr lIns="19050" tIns="19050" rIns="19050" bIns="19050" anchor="t">
-            <a:normAutofit fontScale="91079"/>
-          </a:bodyPr>
-          <a:lstStyle/>
-          <a:p>
-            <a:pPr algn="l">
-              <a:defRPr sz="1275" b="0">
-                <a:solidFill>
-                  <a:srgbClr val="1D2B36"/>
-                </a:solidFill>
-                <a:latin typeface="Bitstream Charter"/>
-                <a:ea typeface="Bitstream Charter"/>
-                <a:cs typeface="Bitstream Charter"/>
-              </a:defRPr>
-            </a:pPr>
-            <a:r>
-              <a:rPr sz="1275" b="0">
-                <a:solidFill>
-                  <a:srgbClr val="1D2B36"/>
-                </a:solidFill>
-                <a:latin typeface="Bitstream Charter"/>
-                <a:ea typeface="Bitstream Charter"/>
-                <a:cs typeface="Bitstream Charter"/>
-              </a:rPr>
-              <a:t>Validate required information.</a:t>
+              <a:t>Calculate score and rating.</a:t>
             </a:r>
           </a:p>
           <a:p>
@@ -1823,72 +1894,6 @@
                 <a:ea typeface="Bitstream Charter"/>
                 <a:cs typeface="Bitstream Charter"/>
               </a:rPr>
-              <a:t>Freeze the input and rule versions.</a:t>
-            </a:r>
-          </a:p>
-          <a:p>
-            <a:endParaRPr sz="1275" b="0">
-              <a:solidFill>
-                <a:srgbClr val="1D2B36"/>
-              </a:solidFill>
-              <a:latin typeface="Bitstream Charter"/>
-              <a:ea typeface="Bitstream Charter"/>
-              <a:cs typeface="Bitstream Charter"/>
-            </a:endParaRPr>
-          </a:p>
-          <a:p>
-            <a:pPr algn="l">
-              <a:defRPr sz="1275" b="0">
-                <a:solidFill>
-                  <a:srgbClr val="1D2B36"/>
-                </a:solidFill>
-                <a:latin typeface="Bitstream Charter"/>
-                <a:ea typeface="Bitstream Charter"/>
-                <a:cs typeface="Bitstream Charter"/>
-              </a:defRPr>
-            </a:pPr>
-            <a:r>
-              <a:rPr sz="1275" b="0">
-                <a:solidFill>
-                  <a:srgbClr val="1D2B36"/>
-                </a:solidFill>
-                <a:latin typeface="Bitstream Charter"/>
-                <a:ea typeface="Bitstream Charter"/>
-                <a:cs typeface="Bitstream Charter"/>
-              </a:rPr>
-              <a:t>Calculate score and rating.</a:t>
-            </a:r>
-          </a:p>
-          <a:p>
-            <a:endParaRPr sz="1275" b="0">
-              <a:solidFill>
-                <a:srgbClr val="1D2B36"/>
-              </a:solidFill>
-              <a:latin typeface="Bitstream Charter"/>
-              <a:ea typeface="Bitstream Charter"/>
-              <a:cs typeface="Bitstream Charter"/>
-            </a:endParaRPr>
-          </a:p>
-          <a:p>
-            <a:pPr algn="l">
-              <a:defRPr sz="1275" b="0">
-                <a:solidFill>
-                  <a:srgbClr val="1D2B36"/>
-                </a:solidFill>
-                <a:latin typeface="Bitstream Charter"/>
-                <a:ea typeface="Bitstream Charter"/>
-                <a:cs typeface="Bitstream Charter"/>
-              </a:defRPr>
-            </a:pPr>
-            <a:r>
-              <a:rPr sz="1275" b="0">
-                <a:solidFill>
-                  <a:srgbClr val="1D2B36"/>
-                </a:solidFill>
-                <a:latin typeface="Bitstream Charter"/>
-                <a:ea typeface="Bitstream Charter"/>
-                <a:cs typeface="Bitstream Charter"/>
-              </a:rPr>
               <a:t>Identify deal-breakers and proposed 2LoD triagers.</a:t>
             </a:r>
           </a:p>
@@ -2063,7 +2068,7 @@
         </p:nvSpPr>
         <p:spPr>
           <a:xfrm>
-            <a:off x="6429375" y="2438400"/>
+            <a:off x="6334125" y="2352675"/>
             <a:ext cx="2000250" cy="438150"/>
           </a:xfrm>
           <a:prstGeom prst="rect">
@@ -2091,7 +2096,7 @@
               </a:defRPr>
             </a:pPr>
             <a:r>
-              <a:rPr sz="1130" b="1" dirty="0">
+              <a:rPr lang="en-GB" sz="1130" b="1" dirty="0">
                 <a:solidFill>
                   <a:srgbClr val="A56317"/>
                 </a:solidFill>
@@ -2099,41 +2104,7 @@
                 <a:ea typeface="Bitstream Charter"/>
                 <a:cs typeface="Bitstream Charter"/>
               </a:rPr>
-              <a:t>Standard SharePoint </a:t>
-            </a:r>
-            <a:r>
-              <a:rPr lang="en-GB" sz="1130" b="1" dirty="0">
-                <a:solidFill>
-                  <a:srgbClr val="A56317"/>
-                </a:solidFill>
-                <a:latin typeface="Bitstream Charter"/>
-                <a:ea typeface="Bitstream Charter"/>
-                <a:cs typeface="Bitstream Charter"/>
-              </a:rPr>
-              <a:t>/ Power App</a:t>
-            </a:r>
-          </a:p>
-          <a:p>
-            <a:pPr algn="l">
-              <a:defRPr sz="1125" b="1">
-                <a:solidFill>
-                  <a:srgbClr val="A56317"/>
-                </a:solidFill>
-                <a:latin typeface="Bitstream Charter"/>
-                <a:ea typeface="Bitstream Charter"/>
-                <a:cs typeface="Bitstream Charter"/>
-              </a:defRPr>
-            </a:pPr>
-            <a:r>
-              <a:rPr lang="en-GB" sz="1130" b="1" dirty="0">
-                <a:solidFill>
-                  <a:srgbClr val="A56317"/>
-                </a:solidFill>
-                <a:latin typeface="Bitstream Charter"/>
-                <a:ea typeface="Bitstream Charter"/>
-                <a:cs typeface="Bitstream Charter"/>
-              </a:rPr>
-              <a:t> </a:t>
+              <a:t>SharePoint / Power App with Power Automate </a:t>
             </a:r>
             <a:endParaRPr sz="1130" b="1" dirty="0">
               <a:solidFill>
@@ -2190,6 +2161,339 @@
               </a:defRPr>
             </a:pPr>
             <a:r>
+              <a:rPr lang="en-GB" sz="1275" b="0" dirty="0">
+                <a:solidFill>
+                  <a:srgbClr val="1D2B36"/>
+                </a:solidFill>
+                <a:latin typeface="Bitstream Charter"/>
+                <a:ea typeface="Bitstream Charter"/>
+                <a:cs typeface="Bitstream Charter"/>
+              </a:rPr>
+              <a:t>Review answers, rationale and evidence.</a:t>
+            </a:r>
+          </a:p>
+          <a:p>
+            <a:endParaRPr lang="en-GB" sz="1275" b="0" dirty="0">
+              <a:solidFill>
+                <a:srgbClr val="1D2B36"/>
+              </a:solidFill>
+              <a:latin typeface="Bitstream Charter"/>
+              <a:ea typeface="Bitstream Charter"/>
+              <a:cs typeface="Bitstream Charter"/>
+            </a:endParaRPr>
+          </a:p>
+          <a:p>
+            <a:pPr algn="l">
+              <a:defRPr sz="1275" b="0">
+                <a:solidFill>
+                  <a:srgbClr val="1D2B36"/>
+                </a:solidFill>
+                <a:latin typeface="Bitstream Charter"/>
+                <a:ea typeface="Bitstream Charter"/>
+                <a:cs typeface="Bitstream Charter"/>
+              </a:defRPr>
+            </a:pPr>
+            <a:r>
+              <a:rPr lang="en-GB" sz="1275" b="0" dirty="0">
+                <a:solidFill>
+                  <a:srgbClr val="1D2B36"/>
+                </a:solidFill>
+                <a:latin typeface="Bitstream Charter"/>
+                <a:ea typeface="Bitstream Charter"/>
+                <a:cs typeface="Bitstream Charter"/>
+              </a:rPr>
+              <a:t>Inspect score breakdown, reason, deal-breakers and proposed triagers.</a:t>
+            </a:r>
+          </a:p>
+          <a:p>
+            <a:endParaRPr lang="en-GB" sz="1275" b="0" dirty="0">
+              <a:solidFill>
+                <a:srgbClr val="1D2B36"/>
+              </a:solidFill>
+              <a:latin typeface="Bitstream Charter"/>
+              <a:ea typeface="Bitstream Charter"/>
+              <a:cs typeface="Bitstream Charter"/>
+            </a:endParaRPr>
+          </a:p>
+          <a:p>
+            <a:pPr algn="l">
+              <a:defRPr sz="1275" b="0">
+                <a:solidFill>
+                  <a:srgbClr val="1D2B36"/>
+                </a:solidFill>
+                <a:latin typeface="Bitstream Charter"/>
+                <a:ea typeface="Bitstream Charter"/>
+                <a:cs typeface="Bitstream Charter"/>
+              </a:defRPr>
+            </a:pPr>
+            <a:r>
+              <a:rPr lang="en-GB" sz="1275" b="0" dirty="0">
+                <a:solidFill>
+                  <a:srgbClr val="1D2B36"/>
+                </a:solidFill>
+                <a:latin typeface="Bitstream Charter"/>
+                <a:ea typeface="Bitstream Charter"/>
+                <a:cs typeface="Bitstream Charter"/>
+              </a:rPr>
+              <a:t>Confirm, update, request information or escalate.</a:t>
+            </a:r>
+          </a:p>
+        </p:txBody>
+      </p:sp>
+      <p:sp>
+        <p:nvSpPr>
+          <p:cNvPr id="19" name="矩形: 圆角 18">
+            <a:extLst>
+              <a:ext uri="{FF2B5EF4-FFF2-40B4-BE49-F238E27FC236}">
+                <a16:creationId xmlns:a16="http://schemas.microsoft.com/office/drawing/2014/main" id="{01D5303E-4266-4576-B2D2-C68C80F7ED95}"/>
+              </a:ext>
+            </a:extLst>
+          </p:cNvPr>
+          <p:cNvSpPr>
+            <a:spLocks noGrp="1"/>
+          </p:cNvSpPr>
+          <p:nvPr/>
+        </p:nvSpPr>
+        <p:spPr>
+          <a:xfrm>
+            <a:off x="8953500" y="1619250"/>
+            <a:ext cx="2381250" cy="3143250"/>
+          </a:xfrm>
+          <a:prstGeom prst="roundRect">
+            <a:avLst>
+              <a:gd name="adj" fmla="val 5600"/>
+            </a:avLst>
+          </a:prstGeom>
+          <a:solidFill>
+            <a:srgbClr val="F0ECF7"/>
+          </a:solidFill>
+          <a:ln w="9525">
+            <a:solidFill>
+              <a:srgbClr val="C8D3DC"/>
+            </a:solidFill>
+            <a:prstDash val="solid"/>
+          </a:ln>
+        </p:spPr>
+      </p:sp>
+      <p:sp>
+        <p:nvSpPr>
+          <p:cNvPr id="20" name="椭圆 19">
+            <a:extLst>
+              <a:ext uri="{FF2B5EF4-FFF2-40B4-BE49-F238E27FC236}">
+                <a16:creationId xmlns:a16="http://schemas.microsoft.com/office/drawing/2014/main" id="{44682376-FDA0-4A5F-9B34-415C7CAFF449}"/>
+              </a:ext>
+            </a:extLst>
+          </p:cNvPr>
+          <p:cNvSpPr>
+            <a:spLocks noGrp="1"/>
+          </p:cNvSpPr>
+          <p:nvPr/>
+        </p:nvSpPr>
+        <p:spPr>
+          <a:xfrm>
+            <a:off x="9124950" y="1809750"/>
+            <a:ext cx="400050" cy="400050"/>
+          </a:xfrm>
+          <a:prstGeom prst="ellipse">
+            <a:avLst/>
+          </a:prstGeom>
+          <a:solidFill>
+            <a:srgbClr val="6B5B95"/>
+          </a:solidFill>
+          <a:ln w="0">
+            <a:solidFill>
+              <a:srgbClr val="6B5B95"/>
+            </a:solidFill>
+          </a:ln>
+        </p:spPr>
+        <p:txBody>
+          <a:bodyPr lIns="0" tIns="0" rIns="0" bIns="0" anchor="ctr">
+            <a:noAutofit/>
+          </a:bodyPr>
+          <a:lstStyle/>
+          <a:p>
+            <a:pPr algn="ctr">
+              <a:defRPr sz="1500" b="1">
+                <a:solidFill>
+                  <a:srgbClr val="FFFFFF"/>
+                </a:solidFill>
+                <a:latin typeface="Bitstream Charter"/>
+                <a:ea typeface="Bitstream Charter"/>
+                <a:cs typeface="Bitstream Charter"/>
+              </a:defRPr>
+            </a:pPr>
+            <a:r>
+              <a:rPr sz="1500" b="1">
+                <a:solidFill>
+                  <a:srgbClr val="FFFFFF"/>
+                </a:solidFill>
+                <a:latin typeface="Bitstream Charter"/>
+                <a:ea typeface="Bitstream Charter"/>
+                <a:cs typeface="Bitstream Charter"/>
+              </a:rPr>
+              <a:t>4</a:t>
+            </a:r>
+          </a:p>
+        </p:txBody>
+      </p:sp>
+      <p:sp>
+        <p:nvSpPr>
+          <p:cNvPr id="21" name="矩形 20">
+            <a:extLst>
+              <a:ext uri="{FF2B5EF4-FFF2-40B4-BE49-F238E27FC236}">
+                <a16:creationId xmlns:a16="http://schemas.microsoft.com/office/drawing/2014/main" id="{56871D3A-EEF9-40B7-AA5E-03139CE9E218}"/>
+              </a:ext>
+            </a:extLst>
+          </p:cNvPr>
+          <p:cNvSpPr>
+            <a:spLocks noGrp="1"/>
+          </p:cNvSpPr>
+          <p:nvPr/>
+        </p:nvSpPr>
+        <p:spPr>
+          <a:xfrm>
+            <a:off x="9639300" y="1781175"/>
+            <a:ext cx="1524000" cy="495300"/>
+          </a:xfrm>
+          <a:prstGeom prst="rect">
+            <a:avLst/>
+          </a:prstGeom>
+          <a:noFill/>
+          <a:ln w="0">
+            <a:noFill/>
+          </a:ln>
+        </p:spPr>
+        <p:txBody>
+          <a:bodyPr lIns="19050" tIns="19050" rIns="19050" bIns="19050" anchor="ctr">
+            <a:normAutofit fontScale="94456" lnSpcReduction="10000"/>
+          </a:bodyPr>
+          <a:lstStyle/>
+          <a:p>
+            <a:pPr algn="l">
+              <a:defRPr sz="1725" b="1">
+                <a:solidFill>
+                  <a:srgbClr val="102A43"/>
+                </a:solidFill>
+                <a:latin typeface="Bitstream Charter"/>
+                <a:ea typeface="Bitstream Charter"/>
+                <a:cs typeface="Bitstream Charter"/>
+              </a:defRPr>
+            </a:pPr>
+            <a:r>
+              <a:rPr sz="1725" b="1">
+                <a:solidFill>
+                  <a:srgbClr val="102A43"/>
+                </a:solidFill>
+                <a:latin typeface="Bitstream Charter"/>
+                <a:ea typeface="Bitstream Charter"/>
+                <a:cs typeface="Bitstream Charter"/>
+              </a:rPr>
+              <a:t>Final result and actions</a:t>
+            </a:r>
+          </a:p>
+        </p:txBody>
+      </p:sp>
+      <p:sp>
+        <p:nvSpPr>
+          <p:cNvPr id="22" name="矩形 21">
+            <a:extLst>
+              <a:ext uri="{FF2B5EF4-FFF2-40B4-BE49-F238E27FC236}">
+                <a16:creationId xmlns:a16="http://schemas.microsoft.com/office/drawing/2014/main" id="{D395A1BE-CC2C-4025-8CFA-5BEEAE932B8E}"/>
+              </a:ext>
+            </a:extLst>
+          </p:cNvPr>
+          <p:cNvSpPr>
+            <a:spLocks noGrp="1"/>
+          </p:cNvSpPr>
+          <p:nvPr/>
+        </p:nvSpPr>
+        <p:spPr>
+          <a:xfrm>
+            <a:off x="9144000" y="2362200"/>
+            <a:ext cx="2000250" cy="323850"/>
+          </a:xfrm>
+          <a:prstGeom prst="rect">
+            <a:avLst/>
+          </a:prstGeom>
+          <a:noFill/>
+          <a:ln w="0">
+            <a:noFill/>
+          </a:ln>
+        </p:spPr>
+        <p:txBody>
+          <a:bodyPr lIns="19050" tIns="19050" rIns="19050" bIns="19050" anchor="ctr">
+            <a:normAutofit/>
+          </a:bodyPr>
+          <a:lstStyle/>
+          <a:p>
+            <a:pPr algn="l">
+              <a:defRPr sz="1125" b="1">
+                <a:solidFill>
+                  <a:srgbClr val="6B5B95"/>
+                </a:solidFill>
+                <a:latin typeface="Bitstream Charter"/>
+                <a:ea typeface="Bitstream Charter"/>
+                <a:cs typeface="Bitstream Charter"/>
+              </a:defRPr>
+            </a:pPr>
+            <a:r>
+              <a:rPr sz="1125" b="1">
+                <a:solidFill>
+                  <a:srgbClr val="6B5B95"/>
+                </a:solidFill>
+                <a:latin typeface="Bitstream Charter"/>
+                <a:ea typeface="Bitstream Charter"/>
+                <a:cs typeface="Bitstream Charter"/>
+              </a:rPr>
+              <a:t>Power Automate</a:t>
+            </a:r>
+          </a:p>
+        </p:txBody>
+      </p:sp>
+      <p:sp>
+        <p:nvSpPr>
+          <p:cNvPr id="23" name="矩形 22">
+            <a:extLst>
+              <a:ext uri="{FF2B5EF4-FFF2-40B4-BE49-F238E27FC236}">
+                <a16:creationId xmlns:a16="http://schemas.microsoft.com/office/drawing/2014/main" id="{8FD66DA9-FDC7-49B7-8E77-A1FD48F23ACD}"/>
+              </a:ext>
+            </a:extLst>
+          </p:cNvPr>
+          <p:cNvSpPr>
+            <a:spLocks noGrp="1"/>
+          </p:cNvSpPr>
+          <p:nvPr/>
+        </p:nvSpPr>
+        <p:spPr>
+          <a:xfrm>
+            <a:off x="9144000" y="2800350"/>
+            <a:ext cx="2000250" cy="1752600"/>
+          </a:xfrm>
+          <a:prstGeom prst="rect">
+            <a:avLst/>
+          </a:prstGeom>
+          <a:noFill/>
+          <a:ln w="0">
+            <a:noFill/>
+          </a:ln>
+        </p:spPr>
+        <p:txBody>
+          <a:bodyPr lIns="19050" tIns="19050" rIns="19050" bIns="19050" anchor="t">
+            <a:normAutofit fontScale="98039"/>
+          </a:bodyPr>
+          <a:lstStyle/>
+          <a:p>
+            <a:pPr algn="l">
+              <a:defRPr sz="1275" b="0">
+                <a:solidFill>
+                  <a:srgbClr val="1D2B36"/>
+                </a:solidFill>
+                <a:latin typeface="Bitstream Charter"/>
+                <a:ea typeface="Bitstream Charter"/>
+                <a:cs typeface="Bitstream Charter"/>
+              </a:defRPr>
+            </a:pPr>
+            <a:r>
               <a:rPr sz="1275" b="0" dirty="0">
                 <a:solidFill>
                   <a:srgbClr val="1D2B36"/>
@@ -2198,7 +2502,40 @@
                 <a:ea typeface="Bitstream Charter"/>
                 <a:cs typeface="Bitstream Charter"/>
               </a:rPr>
-              <a:t>Review answers, rationale and evidence.</a:t>
+              <a:t>Store the confirmed decision separately from the proposal.</a:t>
+            </a:r>
+          </a:p>
+          <a:p>
+            <a:endParaRPr lang="en-GB" sz="1275" b="0" dirty="0">
+              <a:solidFill>
+                <a:srgbClr val="1D2B36"/>
+              </a:solidFill>
+              <a:latin typeface="Bitstream Charter"/>
+              <a:ea typeface="Bitstream Charter"/>
+              <a:cs typeface="Bitstream Charter"/>
+            </a:endParaRPr>
+          </a:p>
+          <a:p>
+            <a:pPr algn="l">
+              <a:defRPr sz="1275" b="0">
+                <a:solidFill>
+                  <a:srgbClr val="1D2B36"/>
+                </a:solidFill>
+                <a:latin typeface="Bitstream Charter"/>
+                <a:ea typeface="Bitstream Charter"/>
+                <a:cs typeface="Bitstream Charter"/>
+              </a:defRPr>
+            </a:pPr>
+            <a:r>
+              <a:rPr lang="en-GB" sz="1275" b="0" dirty="0">
+                <a:solidFill>
+                  <a:srgbClr val="1D2B36"/>
+                </a:solidFill>
+                <a:latin typeface="Bitstream Charter"/>
+                <a:ea typeface="Bitstream Charter"/>
+                <a:cs typeface="Bitstream Charter"/>
+              </a:rPr>
+              <a:t>Generate the final pack.</a:t>
             </a:r>
           </a:p>
           <a:p>
@@ -2223,381 +2560,15 @@
               </a:defRPr>
             </a:pPr>
             <a:r>
-              <a:rPr sz="1275" b="0" dirty="0">
-                <a:solidFill>
-                  <a:srgbClr val="1D2B36"/>
-                </a:solidFill>
-                <a:latin typeface="Bitstream Charter"/>
-                <a:ea typeface="Bitstream Charter"/>
-                <a:cs typeface="Bitstream Charter"/>
-              </a:rPr>
-              <a:t>Inspect score breakdown, reason codes, deal-breakers and proposed triagers.</a:t>
-            </a:r>
-          </a:p>
-          <a:p>
-            <a:endParaRPr sz="1275" b="0" dirty="0">
-              <a:solidFill>
-                <a:srgbClr val="1D2B36"/>
-              </a:solidFill>
-              <a:latin typeface="Bitstream Charter"/>
-              <a:ea typeface="Bitstream Charter"/>
-              <a:cs typeface="Bitstream Charter"/>
-            </a:endParaRPr>
-          </a:p>
-          <a:p>
-            <a:pPr algn="l">
-              <a:defRPr sz="1275" b="0">
-                <a:solidFill>
-                  <a:srgbClr val="1D2B36"/>
-                </a:solidFill>
-                <a:latin typeface="Bitstream Charter"/>
-                <a:ea typeface="Bitstream Charter"/>
-                <a:cs typeface="Bitstream Charter"/>
-              </a:defRPr>
-            </a:pPr>
-            <a:r>
-              <a:rPr sz="1275" b="0" dirty="0">
-                <a:solidFill>
-                  <a:srgbClr val="1D2B36"/>
-                </a:solidFill>
-                <a:latin typeface="Bitstream Charter"/>
-                <a:ea typeface="Bitstream Charter"/>
-                <a:cs typeface="Bitstream Charter"/>
-              </a:rPr>
-              <a:t>Confirm, update, request information or escalate.</a:t>
-            </a:r>
-          </a:p>
-        </p:txBody>
-      </p:sp>
-      <p:sp>
-        <p:nvSpPr>
-          <p:cNvPr id="19" name="矩形: 圆角 18">
-            <a:extLst>
-              <a:ext uri="{FF2B5EF4-FFF2-40B4-BE49-F238E27FC236}">
-                <a16:creationId xmlns:a16="http://schemas.microsoft.com/office/drawing/2014/main" id="{01D5303E-4266-4576-B2D2-C68C80F7ED95}"/>
-              </a:ext>
-            </a:extLst>
-          </p:cNvPr>
-          <p:cNvSpPr>
-            <a:spLocks noGrp="1"/>
-          </p:cNvSpPr>
-          <p:nvPr/>
-        </p:nvSpPr>
-        <p:spPr>
-          <a:xfrm>
-            <a:off x="8953500" y="1619250"/>
-            <a:ext cx="2381250" cy="3143250"/>
-          </a:xfrm>
-          <a:prstGeom prst="roundRect">
-            <a:avLst>
-              <a:gd name="adj" fmla="val 5600"/>
-            </a:avLst>
-          </a:prstGeom>
-          <a:solidFill>
-            <a:srgbClr val="F0ECF7"/>
-          </a:solidFill>
-          <a:ln w="9525">
-            <a:solidFill>
-              <a:srgbClr val="C8D3DC"/>
-            </a:solidFill>
-            <a:prstDash val="solid"/>
-          </a:ln>
-        </p:spPr>
-      </p:sp>
-      <p:sp>
-        <p:nvSpPr>
-          <p:cNvPr id="20" name="椭圆 19">
-            <a:extLst>
-              <a:ext uri="{FF2B5EF4-FFF2-40B4-BE49-F238E27FC236}">
-                <a16:creationId xmlns:a16="http://schemas.microsoft.com/office/drawing/2014/main" id="{44682376-FDA0-4A5F-9B34-415C7CAFF449}"/>
-              </a:ext>
-            </a:extLst>
-          </p:cNvPr>
-          <p:cNvSpPr>
-            <a:spLocks noGrp="1"/>
-          </p:cNvSpPr>
-          <p:nvPr/>
-        </p:nvSpPr>
-        <p:spPr>
-          <a:xfrm>
-            <a:off x="9124950" y="1809750"/>
-            <a:ext cx="400050" cy="400050"/>
-          </a:xfrm>
-          <a:prstGeom prst="ellipse">
-            <a:avLst/>
-          </a:prstGeom>
-          <a:solidFill>
-            <a:srgbClr val="6B5B95"/>
-          </a:solidFill>
-          <a:ln w="0">
-            <a:solidFill>
-              <a:srgbClr val="6B5B95"/>
-            </a:solidFill>
-          </a:ln>
-        </p:spPr>
-        <p:txBody>
-          <a:bodyPr lIns="0" tIns="0" rIns="0" bIns="0" anchor="ctr">
-            <a:noAutofit/>
-          </a:bodyPr>
-          <a:lstStyle/>
-          <a:p>
-            <a:pPr algn="ctr">
-              <a:defRPr sz="1500" b="1">
-                <a:solidFill>
-                  <a:srgbClr val="FFFFFF"/>
-                </a:solidFill>
-                <a:latin typeface="Bitstream Charter"/>
-                <a:ea typeface="Bitstream Charter"/>
-                <a:cs typeface="Bitstream Charter"/>
-              </a:defRPr>
-            </a:pPr>
-            <a:r>
-              <a:rPr sz="1500" b="1">
-                <a:solidFill>
-                  <a:srgbClr val="FFFFFF"/>
-                </a:solidFill>
-                <a:latin typeface="Bitstream Charter"/>
-                <a:ea typeface="Bitstream Charter"/>
-                <a:cs typeface="Bitstream Charter"/>
-              </a:rPr>
-              <a:t>4</a:t>
-            </a:r>
-          </a:p>
-        </p:txBody>
-      </p:sp>
-      <p:sp>
-        <p:nvSpPr>
-          <p:cNvPr id="21" name="矩形 20">
-            <a:extLst>
-              <a:ext uri="{FF2B5EF4-FFF2-40B4-BE49-F238E27FC236}">
-                <a16:creationId xmlns:a16="http://schemas.microsoft.com/office/drawing/2014/main" id="{56871D3A-EEF9-40B7-AA5E-03139CE9E218}"/>
-              </a:ext>
-            </a:extLst>
-          </p:cNvPr>
-          <p:cNvSpPr>
-            <a:spLocks noGrp="1"/>
-          </p:cNvSpPr>
-          <p:nvPr/>
-        </p:nvSpPr>
-        <p:spPr>
-          <a:xfrm>
-            <a:off x="9639300" y="1781175"/>
-            <a:ext cx="1524000" cy="495300"/>
-          </a:xfrm>
-          <a:prstGeom prst="rect">
-            <a:avLst/>
-          </a:prstGeom>
-          <a:noFill/>
-          <a:ln w="0">
-            <a:noFill/>
-          </a:ln>
-        </p:spPr>
-        <p:txBody>
-          <a:bodyPr lIns="19050" tIns="19050" rIns="19050" bIns="19050" anchor="ctr">
-            <a:normAutofit fontScale="94456" lnSpcReduction="10000"/>
-          </a:bodyPr>
-          <a:lstStyle/>
-          <a:p>
-            <a:pPr algn="l">
-              <a:defRPr sz="1725" b="1">
-                <a:solidFill>
-                  <a:srgbClr val="102A43"/>
-                </a:solidFill>
-                <a:latin typeface="Bitstream Charter"/>
-                <a:ea typeface="Bitstream Charter"/>
-                <a:cs typeface="Bitstream Charter"/>
-              </a:defRPr>
-            </a:pPr>
-            <a:r>
-              <a:rPr sz="1725" b="1">
-                <a:solidFill>
-                  <a:srgbClr val="102A43"/>
-                </a:solidFill>
-                <a:latin typeface="Bitstream Charter"/>
-                <a:ea typeface="Bitstream Charter"/>
-                <a:cs typeface="Bitstream Charter"/>
-              </a:rPr>
-              <a:t>Final result and actions</a:t>
-            </a:r>
-          </a:p>
-        </p:txBody>
-      </p:sp>
-      <p:sp>
-        <p:nvSpPr>
-          <p:cNvPr id="22" name="矩形 21">
-            <a:extLst>
-              <a:ext uri="{FF2B5EF4-FFF2-40B4-BE49-F238E27FC236}">
-                <a16:creationId xmlns:a16="http://schemas.microsoft.com/office/drawing/2014/main" id="{D395A1BE-CC2C-4025-8CFA-5BEEAE932B8E}"/>
-              </a:ext>
-            </a:extLst>
-          </p:cNvPr>
-          <p:cNvSpPr>
-            <a:spLocks noGrp="1"/>
-          </p:cNvSpPr>
-          <p:nvPr/>
-        </p:nvSpPr>
-        <p:spPr>
-          <a:xfrm>
-            <a:off x="9144000" y="2362200"/>
-            <a:ext cx="2000250" cy="323850"/>
-          </a:xfrm>
-          <a:prstGeom prst="rect">
-            <a:avLst/>
-          </a:prstGeom>
-          <a:noFill/>
-          <a:ln w="0">
-            <a:noFill/>
-          </a:ln>
-        </p:spPr>
-        <p:txBody>
-          <a:bodyPr lIns="19050" tIns="19050" rIns="19050" bIns="19050" anchor="ctr">
-            <a:normAutofit/>
-          </a:bodyPr>
-          <a:lstStyle/>
-          <a:p>
-            <a:pPr algn="l">
-              <a:defRPr sz="1125" b="1">
-                <a:solidFill>
-                  <a:srgbClr val="6B5B95"/>
-                </a:solidFill>
-                <a:latin typeface="Bitstream Charter"/>
-                <a:ea typeface="Bitstream Charter"/>
-                <a:cs typeface="Bitstream Charter"/>
-              </a:defRPr>
-            </a:pPr>
-            <a:r>
-              <a:rPr sz="1125" b="1">
-                <a:solidFill>
-                  <a:srgbClr val="6B5B95"/>
-                </a:solidFill>
-                <a:latin typeface="Bitstream Charter"/>
-                <a:ea typeface="Bitstream Charter"/>
-                <a:cs typeface="Bitstream Charter"/>
-              </a:rPr>
-              <a:t>Power Automate</a:t>
-            </a:r>
-          </a:p>
-        </p:txBody>
-      </p:sp>
-      <p:sp>
-        <p:nvSpPr>
-          <p:cNvPr id="23" name="矩形 22">
-            <a:extLst>
-              <a:ext uri="{FF2B5EF4-FFF2-40B4-BE49-F238E27FC236}">
-                <a16:creationId xmlns:a16="http://schemas.microsoft.com/office/drawing/2014/main" id="{8FD66DA9-FDC7-49B7-8E77-A1FD48F23ACD}"/>
-              </a:ext>
-            </a:extLst>
-          </p:cNvPr>
-          <p:cNvSpPr>
-            <a:spLocks noGrp="1"/>
-          </p:cNvSpPr>
-          <p:nvPr/>
-        </p:nvSpPr>
-        <p:spPr>
-          <a:xfrm>
-            <a:off x="9144000" y="2800350"/>
-            <a:ext cx="2000250" cy="1752600"/>
-          </a:xfrm>
-          <a:prstGeom prst="rect">
-            <a:avLst/>
-          </a:prstGeom>
-          <a:noFill/>
-          <a:ln w="0">
-            <a:noFill/>
-          </a:ln>
-        </p:spPr>
-        <p:txBody>
-          <a:bodyPr lIns="19050" tIns="19050" rIns="19050" bIns="19050" anchor="t">
-            <a:normAutofit fontScale="98039"/>
-          </a:bodyPr>
-          <a:lstStyle/>
-          <a:p>
-            <a:pPr algn="l">
-              <a:defRPr sz="1275" b="0">
-                <a:solidFill>
-                  <a:srgbClr val="1D2B36"/>
-                </a:solidFill>
-                <a:latin typeface="Bitstream Charter"/>
-                <a:ea typeface="Bitstream Charter"/>
-                <a:cs typeface="Bitstream Charter"/>
-              </a:defRPr>
-            </a:pPr>
-            <a:r>
-              <a:rPr sz="1275" b="0">
-                <a:solidFill>
-                  <a:srgbClr val="1D2B36"/>
-                </a:solidFill>
-                <a:latin typeface="Bitstream Charter"/>
-                <a:ea typeface="Bitstream Charter"/>
-                <a:cs typeface="Bitstream Charter"/>
-              </a:rPr>
-              <a:t>Store the confirmed decision separately from the proposal.</a:t>
-            </a:r>
-          </a:p>
-          <a:p>
-            <a:endParaRPr sz="1275" b="0">
-              <a:solidFill>
-                <a:srgbClr val="1D2B36"/>
-              </a:solidFill>
-              <a:latin typeface="Bitstream Charter"/>
-              <a:ea typeface="Bitstream Charter"/>
-              <a:cs typeface="Bitstream Charter"/>
-            </a:endParaRPr>
-          </a:p>
-          <a:p>
-            <a:pPr algn="l">
-              <a:defRPr sz="1275" b="0">
-                <a:solidFill>
-                  <a:srgbClr val="1D2B36"/>
-                </a:solidFill>
-                <a:latin typeface="Bitstream Charter"/>
-                <a:ea typeface="Bitstream Charter"/>
-                <a:cs typeface="Bitstream Charter"/>
-              </a:defRPr>
-            </a:pPr>
-            <a:r>
-              <a:rPr sz="1275" b="0">
-                <a:solidFill>
-                  <a:srgbClr val="1D2B36"/>
-                </a:solidFill>
-                <a:latin typeface="Bitstream Charter"/>
-                <a:ea typeface="Bitstream Charter"/>
-                <a:cs typeface="Bitstream Charter"/>
-              </a:rPr>
-              <a:t>Generate the final pack.</a:t>
-            </a:r>
-          </a:p>
-          <a:p>
-            <a:endParaRPr sz="1275" b="0">
-              <a:solidFill>
-                <a:srgbClr val="1D2B36"/>
-              </a:solidFill>
-              <a:latin typeface="Bitstream Charter"/>
-              <a:ea typeface="Bitstream Charter"/>
-              <a:cs typeface="Bitstream Charter"/>
-            </a:endParaRPr>
-          </a:p>
-          <a:p>
-            <a:pPr algn="l">
-              <a:defRPr sz="1275" b="0">
-                <a:solidFill>
-                  <a:srgbClr val="1D2B36"/>
-                </a:solidFill>
-                <a:latin typeface="Bitstream Charter"/>
-                <a:ea typeface="Bitstream Charter"/>
-                <a:cs typeface="Bitstream Charter"/>
-              </a:defRPr>
-            </a:pPr>
-            <a:r>
-              <a:rPr sz="1275" b="0">
-                <a:solidFill>
-                  <a:srgbClr val="1D2B36"/>
-                </a:solidFill>
-                <a:latin typeface="Bitstream Charter"/>
-                <a:ea typeface="Bitstream Charter"/>
-                <a:cs typeface="Bitstream Charter"/>
-              </a:rPr>
-              <a:t>Send approved notifications and create follow-up actions.</a:t>
+              <a:rPr lang="en-GB" sz="1275" b="0" dirty="0">
+                <a:solidFill>
+                  <a:srgbClr val="1D2B36"/>
+                </a:solidFill>
+                <a:latin typeface="Bitstream Charter"/>
+                <a:ea typeface="Bitstream Charter"/>
+                <a:cs typeface="Bitstream Charter"/>
+              </a:rPr>
+              <a:t>Send approved notifications, approved emails and create follow-up actions.</a:t>
             </a:r>
           </a:p>
         </p:txBody>
